--- a/dist/초5/사회·역사/역사와생활/초5_사회·역사_역사와생활_04_조선_학생용.pptx
+++ b/dist/초5/사회·역사/역사와생활/초5_사회·역사_역사와생활_04_조선_학생용.pptx
@@ -119,13 +119,13 @@
   <p:extLst>
     <p:ext uri="{521415D9-36F7-43E2-AB2F-B90AF26B5E84}">
       <p14:sectionLst xmlns:p14="http://schemas.microsoft.com/office/powerpoint/2010/main">
-        <p14:section name="도입" id="{02af25ab-c69d-2def-f351-8e27e5e1fc3c}">
+        <p14:section name="도입" id="{5e661d52-6d86-d843-ade4-ae8d4722f46e}">
           <p14:sldIdLst>
             <p14:sldId id="256"/>
             <p14:sldId id="257"/>
           </p14:sldIdLst>
         </p14:section>
-        <p14:section name="개념" id="{584fd950-765e-06cb-8e66-1888d5df6820}">
+        <p14:section name="개념" id="{44c89a45-674e-e402-4a6d-72531351495b}">
           <p14:sldIdLst>
             <p14:sldId id="258"/>
             <p14:sldId id="259"/>
@@ -134,36 +134,36 @@
             <p14:sldId id="264"/>
           </p14:sldIdLst>
         </p14:section>
-        <p14:section name="연습" id="{a67591b9-4d81-988c-f771-e6c3d8fee600}">
+        <p14:section name="연습" id="{511bfb29-b8ff-5270-f379-0c353f05821f}">
           <p14:sldIdLst>
             <p14:sldId id="261"/>
             <p14:sldId id="263"/>
             <p14:sldId id="265"/>
           </p14:sldIdLst>
         </p14:section>
-        <p14:section name="개념" id="{1bed6c60-e023-8fe6-4079-8f90d1bad9c3}">
+        <p14:section name="개념" id="{6a1807ea-19c1-38a0-56f9-fcc3bf63a37c}">
           <p14:sldIdLst/>
         </p14:section>
-        <p14:section name="연습" id="{13618441-df80-5942-fe9a-e7f5f355f5c4}">
+        <p14:section name="연습" id="{5da1bf9d-9f44-587d-c669-82aeefd995c7}">
           <p14:sldIdLst/>
         </p14:section>
-        <p14:section name="개념" id="{ece994a7-2ba8-fc4c-4d3e-3c9822ff4a16}">
+        <p14:section name="개념" id="{b2b504fc-3110-6c3a-ffb0-3be8ec961f1e}">
           <p14:sldIdLst/>
         </p14:section>
-        <p14:section name="연습" id="{a7609845-3260-fe91-267c-3491964218e4}">
+        <p14:section name="연습" id="{fb20236a-c80d-5f73-bdee-e86a8826bf05}">
           <p14:sldIdLst/>
         </p14:section>
-        <p14:section name="확인" id="{d4d2605a-f08a-1ad7-ef7d-37dd28249867}">
+        <p14:section name="확인" id="{f00a633d-7a7d-91bc-a57d-d6bf5f53bbea}">
           <p14:sldIdLst>
             <p14:sldId id="266"/>
           </p14:sldIdLst>
         </p14:section>
-        <p14:section name="정리" id="{9a70da1d-2a5c-11d1-455b-89ca17fdec87}">
+        <p14:section name="정리" id="{4ba02086-a83f-55a7-9695-25a0c7ede647}">
           <p14:sldIdLst>
             <p14:sldId id="267"/>
           </p14:sldIdLst>
         </p14:section>
-        <p14:section name="보충" id="{24a05ac9-2f47-e27c-442d-704bc07eb0c9}">
+        <p14:section name="보충" id="{b0cbb905-c2cd-f754-74c5-f434ce6e9c0a}">
           <p14:sldIdLst>
             <p14:sldId id="268"/>
           </p14:sldIdLst>

--- a/dist/초5/사회·역사/역사와생활/초5_사회·역사_역사와생활_04_조선_학생용.pptx
+++ b/dist/초5/사회·역사/역사와생활/초5_사회·역사_역사와생활_04_조선_학생용.pptx
@@ -119,13 +119,13 @@
   <p:extLst>
     <p:ext uri="{521415D9-36F7-43E2-AB2F-B90AF26B5E84}">
       <p14:sectionLst xmlns:p14="http://schemas.microsoft.com/office/powerpoint/2010/main">
-        <p14:section name="도입" id="{5e661d52-6d86-d843-ade4-ae8d4722f46e}">
+        <p14:section name="도입" id="{002e1757-eae8-f6da-f266-9dfa7f0259fe}">
           <p14:sldIdLst>
             <p14:sldId id="256"/>
             <p14:sldId id="257"/>
           </p14:sldIdLst>
         </p14:section>
-        <p14:section name="개념" id="{44c89a45-674e-e402-4a6d-72531351495b}">
+        <p14:section name="개념" id="{87b5c641-af00-d5af-87b7-996fc4bdf243}">
           <p14:sldIdLst>
             <p14:sldId id="258"/>
             <p14:sldId id="259"/>
@@ -134,36 +134,36 @@
             <p14:sldId id="264"/>
           </p14:sldIdLst>
         </p14:section>
-        <p14:section name="연습" id="{511bfb29-b8ff-5270-f379-0c353f05821f}">
+        <p14:section name="연습" id="{c4463720-db51-f4dc-c535-669f6a258f06}">
           <p14:sldIdLst>
             <p14:sldId id="261"/>
             <p14:sldId id="263"/>
             <p14:sldId id="265"/>
           </p14:sldIdLst>
         </p14:section>
-        <p14:section name="개념" id="{6a1807ea-19c1-38a0-56f9-fcc3bf63a37c}">
+        <p14:section name="개념" id="{9a82a35d-fa90-2ba8-a204-67189c1320d1}">
           <p14:sldIdLst/>
         </p14:section>
-        <p14:section name="연습" id="{5da1bf9d-9f44-587d-c669-82aeefd995c7}">
+        <p14:section name="연습" id="{4fca62b8-2ad3-3acb-a6e3-4a962bf3d1d1}">
           <p14:sldIdLst/>
         </p14:section>
-        <p14:section name="개념" id="{b2b504fc-3110-6c3a-ffb0-3be8ec961f1e}">
+        <p14:section name="개념" id="{cf2b8ce0-9fe2-0a2d-8e37-8fd307b880dc}">
           <p14:sldIdLst/>
         </p14:section>
-        <p14:section name="연습" id="{fb20236a-c80d-5f73-bdee-e86a8826bf05}">
+        <p14:section name="연습" id="{210f957e-3fd0-46eb-7d84-f0498b7b0568}">
           <p14:sldIdLst/>
         </p14:section>
-        <p14:section name="확인" id="{f00a633d-7a7d-91bc-a57d-d6bf5f53bbea}">
+        <p14:section name="확인" id="{64918e18-2fd0-6fab-fcb7-b500689b9a85}">
           <p14:sldIdLst>
             <p14:sldId id="266"/>
           </p14:sldIdLst>
         </p14:section>
-        <p14:section name="정리" id="{4ba02086-a83f-55a7-9695-25a0c7ede647}">
+        <p14:section name="정리" id="{baf0595c-967f-129a-97f9-c1ca6756cc1f}">
           <p14:sldIdLst>
             <p14:sldId id="267"/>
           </p14:sldIdLst>
         </p14:section>
-        <p14:section name="보충" id="{b0cbb905-c2cd-f754-74c5-f434ce6e9c0a}">
+        <p14:section name="보충" id="{f7f5c90d-fb03-1722-50a1-3aeb0a625db2}">
           <p14:sldIdLst>
             <p14:sldId id="268"/>
           </p14:sldIdLst>
